--- a/산출물/실전반/이론_오프라인/06회차/실전반_오프라인_06회차.pptx
+++ b/산출물/실전반/이론_오프라인/06회차/실전반_오프라인_06회차.pptx
@@ -550,11 +550,6 @@
           </a:p>
           <a:p>
             <a:r>
-              <a:t>· 이론은 온라인 교재의 장에서 오늘 실습에 쓰는 것만</a:t>
-            </a:r>
-          </a:p>
-          <a:p>
-            <a:r>
               <a:t>[다음] 학습목표</a:t>
             </a:r>
           </a:p>
@@ -635,7 +630,7 @@
           </a:p>
           <a:p>
             <a:r>
-              <a:t>· 실습에서 긴급 확인 표시를 spec.md로 명세하고 기존 출력과 질문 · 승인 조건을 지키며 구현한다</a:t>
+              <a:t>· 「긴급한 경보는 빨리」의 갈래 → 새 기능만 본 확인 → spec.md의 여섯 칸 → 계약 → 수용 기준 → 긴급 조건 → 승인을 건너뛰자는 요구</a:t>
             </a:r>
           </a:p>
           <a:p>
@@ -905,7 +900,7 @@
           <a:lstStyle/>
           <a:p>
             <a:r>
-              <a:t>[짚을 곳] 표 여섯 줄(실습 spec.md 틀 순서) → 셋째 열(빠지면) → 강조한 마지막 줄</a:t>
+              <a:t>[짚을 곳] 표 여섯 줄(spec.md 틀 순서) → 셋째 열(빠지면) → 강조한 마지막 줄</a:t>
             </a:r>
           </a:p>
           <a:p>
@@ -1440,7 +1435,7 @@
           </a:p>
           <a:p>
             <a:r>
-              <a:t>· 실습에서 일반 · 긴급 · 경계 · 누락 · 거절 · 도구 오류의 기대 결과를 먼저 적는다</a:t>
+              <a:t>· 시나리오 한 편 → 거절에서 일어나지 않아야 할 일 → 명세의 칸이 놓이는 자리 → 기대 결과를 정하는 두 방법</a:t>
             </a:r>
           </a:p>
           <a:p>
@@ -1960,11 +1955,6 @@
           </a:p>
           <a:p>
             <a:r>
-              <a:t>· 실습에서도 기대 결과는 반드시 실행 전에</a:t>
-            </a:r>
-          </a:p>
-          <a:p>
-            <a:r>
               <a:t>[다음] 정상 · 경계 · 누락 · 회귀의 검증</a:t>
             </a:r>
           </a:p>
@@ -2045,7 +2035,7 @@
           </a:p>
           <a:p>
             <a:r>
-              <a:t>· 실습에서 실제 오류의 원인을 고친 뒤 기존 사례도 다시 돌린다</a:t>
+              <a:t>· 사례의 종류 → 60.0 ℃ 경계값 → 표현 차이와 계약 위반 → 회귀 시험</a:t>
             </a:r>
           </a:p>
           <a:p>
@@ -2840,7 +2830,7 @@
           </a:p>
           <a:p>
             <a:r>
-              <a:t>· 세 문제: 미판정 vs 긴급 아님, 표시 · 검토 vs 승인, 새 기능 통과 vs 기존 기능 회귀</a:t>
+              <a:t>· 세 문제: 미판정 vs 긴급 아님, 표현 차이 vs 계약 위반, 새 기능 통과 vs 기존 기능 회귀</a:t>
             </a:r>
           </a:p>
           <a:p>
@@ -3320,7 +3310,7 @@
           </a:p>
           <a:p>
             <a:r>
-              <a:t>· 실습에서 필수 정보가 빠졌을 때 묻고 답을 받아 다시 판단하는 흐름을 구현한다</a:t>
+              <a:t>· 확정할 수 없는 요청 → 일마다 정한 결정자 → 승인 · 거절 · 보류의 기록 → 같은 요청 번호에 잇는 답 → 질문으로 바꾸지 못하는 것</a:t>
             </a:r>
           </a:p>
           <a:p>
@@ -26574,7 +26564,7 @@
                 <a:ea typeface="맑은 고딕"/>
                 <a:cs typeface="맑은 고딕"/>
               </a:rPr>
-              <a:t>같은 점검 요청에서 나오는 물음마다 답이 놓인 자리가 달라서, 헷갈리는 짝을 가르는 것이 오늘의 핵심이다.</a:t>
+              <a:t>같은 점검 요청에서 나오는 물음마다 답이 놓인 자리가 달라서, 헷갈리는 짝을 가르면 결정과 검증의 자리가 드러난다.</a:t>
             </a:r>
           </a:p>
         </p:txBody>
